--- a/presentation/DraftWise_AI_5min_FINAL.pptx
+++ b/presentation/DraftWise_AI_5min_FINAL.pptx
@@ -698,7 +698,7 @@
           <a:p/>
           <a:p>
             <a:r>
-              <a:t>이 화면은 도식이 아니라 실제 Chrome 실행 캡처입니다. 왼쪽은 내 포지션과 양쪽 픽·밴 슬롯, 중앙 챔피언 선택창입니다. 다섯 포지션과 173명을 지원합니다. 오른쪽은 미드 주력으로 아리를 등록한 화면입니다. 주력 목록은 포지션별로 저장하고 새로고침 후에도 유지합니다. 픽과 밴 중복은 UI와 서버에서 함께 검사합니다.</a:t>
+              <a:t>실제 Chrome 실행 캡처입니다. 왼쪽은 내 포지션과 양쪽 픽·밴 슬롯, 중앙 챔피언 선택창입니다. 다섯 포지션과 173명을 지원합니다. 오른쪽은 미드 주력으로 아리를 등록한 화면입니다. 주력 목록은 포지션별로 저장하고 새로고침 후에도 유지합니다. 픽과 밴 중복은 UI와 서버에서 함께 검사합니다.</a:t>
             </a:r>
           </a:p>
         </p:txBody>
@@ -1158,7 +1158,7 @@
           <a:p/>
           <a:p>
             <a:r>
-              <a:t>소스, 보고서, 실행 로그와 캡처를 제출 자료로 정리했습니다. 남은 교육생 번호와 제출 조건을 확인하겠습니다. 모델 호출 성공과 설명 검증을 구분하고 실제 실행으로 확인하는 중요성을 배웠습니다. 감사합니다.</a:t>
+              <a:t>추천 점수의 재현성, 모델 호출 성공, 설명 검증을 구분하며 검증 가능한 결과를 만드는 중요성을 배웠습니다. 감사합니다.</a:t>
             </a:r>
           </a:p>
         </p:txBody>
@@ -1558,6 +1558,10 @@
             <a:prstDash val="solid"/>
           </a:ln>
         </p:spPr>
+        <p:txBody>
+          <a:bodyPr/>
+          <a:p/>
+        </p:txBody>
       </p:sp>
       <p:sp>
         <p:nvSpPr>
@@ -1585,6 +1589,10 @@
             <a:prstDash val="solid"/>
           </a:ln>
         </p:spPr>
+        <p:txBody>
+          <a:bodyPr/>
+          <a:p/>
+        </p:txBody>
       </p:sp>
       <p:sp>
         <p:nvSpPr>
@@ -1860,6 +1868,10 @@
             <a:prstDash val="solid"/>
           </a:ln>
         </p:spPr>
+        <p:txBody>
+          <a:bodyPr/>
+          <a:p/>
+        </p:txBody>
       </p:sp>
       <p:sp>
         <p:nvSpPr>
@@ -1889,6 +1901,10 @@
             <a:prstDash val="solid"/>
           </a:ln>
         </p:spPr>
+        <p:txBody>
+          <a:bodyPr/>
+          <a:p/>
+        </p:txBody>
       </p:sp>
       <p:sp>
         <p:nvSpPr>
@@ -1959,6 +1975,10 @@
             <a:prstDash val="solid"/>
           </a:ln>
         </p:spPr>
+        <p:txBody>
+          <a:bodyPr/>
+          <a:p/>
+        </p:txBody>
       </p:sp>
       <p:sp>
         <p:nvSpPr>
@@ -2029,6 +2049,10 @@
             <a:prstDash val="solid"/>
           </a:ln>
         </p:spPr>
+        <p:txBody>
+          <a:bodyPr/>
+          <a:p/>
+        </p:txBody>
       </p:sp>
       <p:sp>
         <p:nvSpPr>
@@ -2099,6 +2123,10 @@
             <a:prstDash val="solid"/>
           </a:ln>
         </p:spPr>
+        <p:txBody>
+          <a:bodyPr/>
+          <a:p/>
+        </p:txBody>
       </p:sp>
       <p:sp>
         <p:nvSpPr>
@@ -2169,6 +2197,10 @@
             <a:prstDash val="solid"/>
           </a:ln>
         </p:spPr>
+        <p:txBody>
+          <a:bodyPr/>
+          <a:p/>
+        </p:txBody>
       </p:sp>
       <p:sp>
         <p:nvSpPr>
@@ -2246,7 +2278,7 @@
                 <a:ea typeface="Noto Sans CJK KR" pitchFamily="34" charset="-122"/>
                 <a:cs typeface="Noto Sans CJK KR" pitchFamily="34" charset="-120"/>
               </a:rPr>
-              <a:t>발표자  김예찬     |     교육생 번호  [입력]</a:t>
+              <a:t>발표자  김예찬</a:t>
             </a:r>
             <a:endParaRPr lang="en-US" sz="1400" dirty="0"/>
           </a:p>
@@ -2394,6 +2426,10 @@
             <a:prstDash val="solid"/>
           </a:ln>
         </p:spPr>
+        <p:txBody>
+          <a:bodyPr/>
+          <a:p/>
+        </p:txBody>
       </p:sp>
       <p:sp>
         <p:nvSpPr>
@@ -2421,6 +2457,10 @@
             <a:prstDash val="solid"/>
           </a:ln>
         </p:spPr>
+        <p:txBody>
+          <a:bodyPr/>
+          <a:p/>
+        </p:txBody>
       </p:sp>
       <p:sp>
         <p:nvSpPr>
@@ -2530,6 +2570,10 @@
             <a:prstDash val="solid"/>
           </a:ln>
         </p:spPr>
+        <p:txBody>
+          <a:bodyPr/>
+          <a:p/>
+        </p:txBody>
       </p:sp>
       <p:sp>
         <p:nvSpPr>
@@ -2641,6 +2685,10 @@
             <a:prstDash val="solid"/>
           </a:ln>
         </p:spPr>
+        <p:txBody>
+          <a:bodyPr/>
+          <a:p/>
+        </p:txBody>
       </p:sp>
       <p:sp>
         <p:nvSpPr>
@@ -2793,6 +2841,10 @@
             <a:prstDash val="solid"/>
           </a:ln>
         </p:spPr>
+        <p:txBody>
+          <a:bodyPr/>
+          <a:p/>
+        </p:txBody>
       </p:sp>
       <p:sp>
         <p:nvSpPr>
@@ -2945,6 +2997,10 @@
             <a:prstDash val="solid"/>
           </a:ln>
         </p:spPr>
+        <p:txBody>
+          <a:bodyPr/>
+          <a:p/>
+        </p:txBody>
       </p:sp>
       <p:sp>
         <p:nvSpPr>
@@ -3097,6 +3153,10 @@
             <a:prstDash val="solid"/>
           </a:ln>
         </p:spPr>
+        <p:txBody>
+          <a:bodyPr/>
+          <a:p/>
+        </p:txBody>
       </p:sp>
       <p:sp>
         <p:nvSpPr>
@@ -3167,6 +3227,10 @@
             <a:prstDash val="solid"/>
           </a:ln>
         </p:spPr>
+        <p:txBody>
+          <a:bodyPr/>
+          <a:p/>
+        </p:txBody>
       </p:sp>
       <p:sp>
         <p:nvSpPr>
@@ -3278,6 +3342,10 @@
             <a:prstDash val="solid"/>
           </a:ln>
         </p:spPr>
+        <p:txBody>
+          <a:bodyPr/>
+          <a:p/>
+        </p:txBody>
       </p:sp>
       <p:sp>
         <p:nvSpPr>
@@ -3389,6 +3457,10 @@
             <a:prstDash val="solid"/>
           </a:ln>
         </p:spPr>
+        <p:txBody>
+          <a:bodyPr/>
+          <a:p/>
+        </p:txBody>
       </p:sp>
       <p:sp>
         <p:nvSpPr>
@@ -3508,47 +3580,6 @@
                 <a:cs typeface="Noto Sans CJK KR" pitchFamily="34" charset="-120"/>
               </a:rPr>
               <a:t>설명 가능한 픽</a:t>
-            </a:r>
-            <a:endParaRPr lang="en-US" sz="1200" dirty="0"/>
-          </a:p>
-        </p:txBody>
-      </p:sp>
-      <p:sp>
-        <p:nvSpPr>
-          <p:cNvPr id="33" name="Text 31"/>
-          <p:cNvSpPr/>
-          <p:nvPr/>
-        </p:nvSpPr>
-        <p:spPr>
-          <a:xfrm>
-            <a:off x="731520" y="5907024"/>
-            <a:ext cx="10789920" cy="301752"/>
-          </a:xfrm>
-          <a:prstGeom prst="rect">
-            <a:avLst/>
-          </a:prstGeom>
-          <a:noFill/>
-          <a:ln/>
-        </p:spPr>
-        <p:txBody>
-          <a:bodyPr wrap="square" lIns="0" tIns="0" rIns="0" bIns="0" rtlCol="0" anchor="ctr">
-            <a:normAutofit/>
-          </a:bodyPr>
-          <a:lstStyle/>
-          <a:p>
-            <a:pPr algn="l" indent="0" marL="0">
-              <a:buNone/>
-            </a:pPr>
-            <a:r>
-              <a:rPr lang="en-US" sz="1200" dirty="0">
-                <a:solidFill>
-                  <a:srgbClr val="AFC3D1"/>
-                </a:solidFill>
-                <a:latin typeface="Noto Sans CJK KR" pitchFamily="34" charset="0"/>
-                <a:ea typeface="Noto Sans CJK KR" pitchFamily="34" charset="-122"/>
-                <a:cs typeface="Noto Sans CJK KR" pitchFamily="34" charset="-120"/>
-              </a:rPr>
-              <a:t>목표: 실시간 승률 예측이 아니라, 입력된 조합을 일관된 규칙으로 분석하고 근거를 제시</a:t>
             </a:r>
             <a:endParaRPr lang="en-US" sz="1200" dirty="0"/>
           </a:p>
@@ -3614,6 +3645,10 @@
             <a:prstDash val="solid"/>
           </a:ln>
         </p:spPr>
+        <p:txBody>
+          <a:bodyPr/>
+          <a:p/>
+        </p:txBody>
       </p:sp>
       <p:sp>
         <p:nvSpPr>
@@ -3641,6 +3676,10 @@
             <a:prstDash val="solid"/>
           </a:ln>
         </p:spPr>
+        <p:txBody>
+          <a:bodyPr/>
+          <a:p/>
+        </p:txBody>
       </p:sp>
       <p:sp>
         <p:nvSpPr>
@@ -3750,6 +3789,10 @@
             <a:prstDash val="solid"/>
           </a:ln>
         </p:spPr>
+        <p:txBody>
+          <a:bodyPr/>
+          <a:p/>
+        </p:txBody>
       </p:sp>
       <p:sp>
         <p:nvSpPr>
@@ -3830,48 +3873,6 @@
               <a:t>03 / 08</a:t>
             </a:r>
             <a:endParaRPr lang="en-US" sz="900" dirty="0"/>
-          </a:p>
-        </p:txBody>
-      </p:sp>
-      <p:sp>
-        <p:nvSpPr>
-          <p:cNvPr id="9" name="TextBox 8"/>
-          <p:cNvSpPr txBox="1"/>
-          <p:nvPr/>
-        </p:nvSpPr>
-        <p:spPr>
-          <a:xfrm>
-            <a:off x="658368" y="1618488"/>
-            <a:ext cx="10881360" cy="246888"/>
-          </a:xfrm>
-          <a:prstGeom prst="rect">
-            <a:avLst/>
-          </a:prstGeom>
-          <a:noFill/>
-        </p:spPr>
-        <p:txBody>
-          <a:bodyPr wrap="square" lIns="0" rIns="0" tIns="0" bIns="0" anchor="ctr">
-            <a:noAutofit/>
-          </a:bodyPr>
-          <a:lstStyle/>
-          <a:p>
-            <a:pPr>
-              <a:spcBef>
-                <a:spcPts val="0"/>
-              </a:spcBef>
-              <a:spcAft>
-                <a:spcPts val="0"/>
-              </a:spcAft>
-            </a:pPr>
-            <a:r>
-              <a:rPr sz="1200" b="0">
-                <a:solidFill>
-                  <a:srgbClr val="AFC3D1"/>
-                </a:solidFill>
-                <a:latin typeface="Noto Sans CJK KR"/>
-              </a:rPr>
-              <a:t>실제 Chrome 실행 화면 · 양 팀 픽·밴과 포지션별 주력 관리</a:t>
-            </a:r>
           </a:p>
         </p:txBody>
       </p:sp>
@@ -4121,6 +4122,10 @@
             <a:prstDash val="solid"/>
           </a:ln>
         </p:spPr>
+        <p:txBody>
+          <a:bodyPr/>
+          <a:p/>
+        </p:txBody>
       </p:sp>
       <p:sp>
         <p:nvSpPr>
@@ -4148,6 +4153,10 @@
             <a:prstDash val="solid"/>
           </a:ln>
         </p:spPr>
+        <p:txBody>
+          <a:bodyPr/>
+          <a:p/>
+        </p:txBody>
       </p:sp>
       <p:sp>
         <p:nvSpPr>
@@ -4257,6 +4266,10 @@
             <a:prstDash val="solid"/>
           </a:ln>
         </p:spPr>
+        <p:txBody>
+          <a:bodyPr/>
+          <a:p/>
+        </p:txBody>
       </p:sp>
       <p:sp>
         <p:nvSpPr>
@@ -4368,6 +4381,10 @@
             <a:prstDash val="solid"/>
           </a:ln>
         </p:spPr>
+        <p:txBody>
+          <a:bodyPr/>
+          <a:p/>
+        </p:txBody>
       </p:sp>
       <p:sp>
         <p:nvSpPr>
@@ -4445,7 +4462,7 @@
                 <a:ea typeface="Noto Sans CJK KR" pitchFamily="34" charset="-122"/>
                 <a:cs typeface="Noto Sans CJK KR" pitchFamily="34" charset="-120"/>
               </a:rPr>
-              <a:t>픽·밴 / 숙련도 입력</a:t>
+              <a:t>픽·밴 / 주력 입력</a:t>
             </a:r>
             <a:endParaRPr lang="en-US" sz="1000" dirty="0"/>
           </a:p>
@@ -4520,6 +4537,10 @@
             <a:prstDash val="solid"/>
           </a:ln>
         </p:spPr>
+        <p:txBody>
+          <a:bodyPr/>
+          <a:p/>
+        </p:txBody>
       </p:sp>
       <p:sp>
         <p:nvSpPr>
@@ -4672,6 +4693,10 @@
             <a:prstDash val="solid"/>
           </a:ln>
         </p:spPr>
+        <p:txBody>
+          <a:bodyPr/>
+          <a:p/>
+        </p:txBody>
       </p:sp>
       <p:sp>
         <p:nvSpPr>
@@ -4824,6 +4849,10 @@
             <a:prstDash val="solid"/>
           </a:ln>
         </p:spPr>
+        <p:txBody>
+          <a:bodyPr/>
+          <a:p/>
+        </p:txBody>
       </p:sp>
       <p:sp>
         <p:nvSpPr>
@@ -4976,6 +5005,10 @@
             <a:prstDash val="solid"/>
           </a:ln>
         </p:spPr>
+        <p:txBody>
+          <a:bodyPr/>
+          <a:p/>
+        </p:txBody>
       </p:sp>
       <p:sp>
         <p:nvSpPr>
@@ -5087,6 +5120,10 @@
             <a:prstDash val="solid"/>
           </a:ln>
         </p:spPr>
+        <p:txBody>
+          <a:bodyPr/>
+          <a:p/>
+        </p:txBody>
       </p:sp>
       <p:sp>
         <p:nvSpPr>
@@ -5157,6 +5194,10 @@
             <a:prstDash val="solid"/>
           </a:ln>
         </p:spPr>
+        <p:txBody>
+          <a:bodyPr/>
+          <a:p/>
+        </p:txBody>
       </p:sp>
       <p:sp>
         <p:nvSpPr>
@@ -5268,6 +5309,10 @@
             <a:prstDash val="solid"/>
           </a:ln>
         </p:spPr>
+        <p:txBody>
+          <a:bodyPr/>
+          <a:p/>
+        </p:txBody>
       </p:sp>
       <p:sp>
         <p:nvSpPr>
@@ -5379,6 +5424,10 @@
             <a:prstDash val="solid"/>
           </a:ln>
         </p:spPr>
+        <p:txBody>
+          <a:bodyPr/>
+          <a:p/>
+        </p:txBody>
       </p:sp>
       <p:sp>
         <p:nvSpPr>
@@ -5500,47 +5549,6 @@
               <a:t>OpenAI는 제공된 근거 번호만 선택 → 서버가 검증 후 챔피언 이름·점수·문장 구성</a:t>
             </a:r>
             <a:endParaRPr lang="en-US" sz="1500" dirty="0"/>
-          </a:p>
-        </p:txBody>
-      </p:sp>
-      <p:sp>
-        <p:nvSpPr>
-          <p:cNvPr id="40" name="Text 38"/>
-          <p:cNvSpPr/>
-          <p:nvPr/>
-        </p:nvSpPr>
-        <p:spPr>
-          <a:xfrm>
-            <a:off x="722376" y="6099048"/>
-            <a:ext cx="10826496" cy="246888"/>
-          </a:xfrm>
-          <a:prstGeom prst="rect">
-            <a:avLst/>
-          </a:prstGeom>
-          <a:noFill/>
-          <a:ln/>
-        </p:spPr>
-        <p:txBody>
-          <a:bodyPr wrap="square" lIns="0" tIns="0" rIns="0" bIns="0" rtlCol="0" anchor="ctr">
-            <a:normAutofit/>
-          </a:bodyPr>
-          <a:lstStyle/>
-          <a:p>
-            <a:pPr algn="l" indent="0" marL="0">
-              <a:buNone/>
-            </a:pPr>
-            <a:r>
-              <a:rPr lang="en-US" sz="1100" dirty="0">
-                <a:solidFill>
-                  <a:srgbClr val="AFC3D1"/>
-                </a:solidFill>
-                <a:latin typeface="Noto Sans CJK KR" pitchFamily="34" charset="0"/>
-                <a:ea typeface="Noto Sans CJK KR" pitchFamily="34" charset="-122"/>
-                <a:cs typeface="Noto Sans CJK KR" pitchFamily="34" charset="-120"/>
-              </a:rPr>
-              <a:t>※ 정량 점수와 추천 순위는 Python이 결정 · LangGraph는 정해진 선형 실행 흐름</a:t>
-            </a:r>
-            <a:endParaRPr lang="en-US" sz="1100" dirty="0"/>
           </a:p>
         </p:txBody>
       </p:sp>
@@ -5604,6 +5612,10 @@
             <a:prstDash val="solid"/>
           </a:ln>
         </p:spPr>
+        <p:txBody>
+          <a:bodyPr/>
+          <a:p/>
+        </p:txBody>
       </p:sp>
       <p:sp>
         <p:nvSpPr>
@@ -5631,6 +5643,10 @@
             <a:prstDash val="solid"/>
           </a:ln>
         </p:spPr>
+        <p:txBody>
+          <a:bodyPr/>
+          <a:p/>
+        </p:txBody>
       </p:sp>
       <p:sp>
         <p:nvSpPr>
@@ -5740,6 +5756,10 @@
             <a:prstDash val="solid"/>
           </a:ln>
         </p:spPr>
+        <p:txBody>
+          <a:bodyPr/>
+          <a:p/>
+        </p:txBody>
       </p:sp>
       <p:sp>
         <p:nvSpPr>
@@ -6004,7 +6024,7 @@
                 </a:solidFill>
                 <a:latin typeface="Noto Sans CJK KR"/>
               </a:rPr>
-              <a:t>수치는 특성 보유 챔피언 수이며 승률이 아님 · 실제 캡처의 추천 점수와 비교 결과</a:t>
+              <a:t>수치는 특성 보유 챔피언 수이며 승률이 아님</a:t>
             </a:r>
           </a:p>
         </p:txBody>
@@ -6069,6 +6089,10 @@
             <a:prstDash val="solid"/>
           </a:ln>
         </p:spPr>
+        <p:txBody>
+          <a:bodyPr/>
+          <a:p/>
+        </p:txBody>
       </p:sp>
       <p:sp>
         <p:nvSpPr>
@@ -6096,6 +6120,10 @@
             <a:prstDash val="solid"/>
           </a:ln>
         </p:spPr>
+        <p:txBody>
+          <a:bodyPr/>
+          <a:p/>
+        </p:txBody>
       </p:sp>
       <p:sp>
         <p:nvSpPr>
@@ -6205,6 +6233,10 @@
             <a:prstDash val="solid"/>
           </a:ln>
         </p:spPr>
+        <p:txBody>
+          <a:bodyPr/>
+          <a:p/>
+        </p:txBody>
       </p:sp>
       <p:sp>
         <p:nvSpPr>
@@ -6316,6 +6348,10 @@
             <a:prstDash val="solid"/>
           </a:ln>
         </p:spPr>
+        <p:txBody>
+          <a:bodyPr/>
+          <a:p/>
+        </p:txBody>
       </p:sp>
       <p:sp>
         <p:nvSpPr>
@@ -6427,6 +6463,10 @@
             <a:prstDash val="solid"/>
           </a:ln>
         </p:spPr>
+        <p:txBody>
+          <a:bodyPr/>
+          <a:p/>
+        </p:txBody>
       </p:sp>
       <p:sp>
         <p:nvSpPr>
@@ -6538,6 +6578,10 @@
             <a:prstDash val="solid"/>
           </a:ln>
         </p:spPr>
+        <p:txBody>
+          <a:bodyPr/>
+          <a:p/>
+        </p:txBody>
       </p:sp>
       <p:sp>
         <p:nvSpPr>
@@ -6814,7 +6858,7 @@
                 </a:solidFill>
                 <a:latin typeface="Noto Sans CJK KR"/>
               </a:rPr>
-              <a:t>최근 10개 기록 조회 · 픽·밴 슬롯과 설정 복원 · 캡처는 최근 기록 중 일부 확대</a:t>
+              <a:t>픽·밴 슬롯과 분석 설정을 함께 복원</a:t>
             </a:r>
           </a:p>
         </p:txBody>
@@ -8017,6 +8061,10 @@
             <a:prstDash val="solid"/>
           </a:ln>
         </p:spPr>
+        <p:txBody>
+          <a:bodyPr/>
+          <a:p/>
+        </p:txBody>
       </p:sp>
       <p:sp>
         <p:nvSpPr>
@@ -8044,6 +8092,10 @@
             <a:prstDash val="solid"/>
           </a:ln>
         </p:spPr>
+        <p:txBody>
+          <a:bodyPr/>
+          <a:p/>
+        </p:txBody>
       </p:sp>
       <p:sp>
         <p:nvSpPr>
@@ -8080,7 +8132,7 @@
                 <a:ea typeface="Noto Sans CJK KR" pitchFamily="34" charset="-122"/>
                 <a:cs typeface="Noto Sans CJK KR" pitchFamily="34" charset="-120"/>
               </a:rPr>
-              <a:t>APPENDIX / SUBMISSION</a:t>
+              <a:t>07 / CLOSING</a:t>
             </a:r>
             <a:endParaRPr lang="en-US" sz="1000" dirty="0"/>
           </a:p>
@@ -8121,7 +8173,7 @@
                 <a:ea typeface="Noto Sans CJK KR" pitchFamily="34" charset="-122"/>
                 <a:cs typeface="Noto Sans CJK KR" pitchFamily="34" charset="-120"/>
               </a:rPr>
-              <a:t>최종 제출 파일과 확인 사항</a:t>
+              <a:t>감사합니다</a:t>
             </a:r>
             <a:endParaRPr lang="en-US" sz="2800" dirty="0"/>
           </a:p>
@@ -8238,690 +8290,103 @@
       </p:sp>
       <p:sp>
         <p:nvSpPr>
-          <p:cNvPr id="9" name="Shape 7"/>
-          <p:cNvSpPr/>
-          <p:nvPr/>
-        </p:nvSpPr>
-        <p:spPr>
-          <a:xfrm>
-            <a:off x="658368" y="1801368"/>
-            <a:ext cx="5340096" cy="1252728"/>
-          </a:xfrm>
-          <a:prstGeom prst="roundRect">
-            <a:avLst>
-              <a:gd name="adj" fmla="val 13139"/>
-            </a:avLst>
-          </a:prstGeom>
-          <a:solidFill>
-            <a:srgbClr val="122637"/>
-          </a:solidFill>
-          <a:ln w="12700">
-            <a:solidFill>
-              <a:srgbClr val="122637">
-                <a:alpha val="0"/>
-              </a:srgbClr>
-            </a:solidFill>
-            <a:prstDash val="solid"/>
-          </a:ln>
-        </p:spPr>
-      </p:sp>
-      <p:sp>
-        <p:nvSpPr>
-          <p:cNvPr id="10" name="Text 8"/>
-          <p:cNvSpPr/>
-          <p:nvPr/>
-        </p:nvSpPr>
-        <p:spPr>
-          <a:xfrm>
-            <a:off x="877824" y="1965960"/>
-            <a:ext cx="4882896" cy="365760"/>
-          </a:xfrm>
-          <a:prstGeom prst="rect">
-            <a:avLst/>
-          </a:prstGeom>
-          <a:noFill/>
-          <a:ln/>
-        </p:spPr>
-        <p:txBody>
-          <a:bodyPr wrap="square" lIns="0" tIns="0" rIns="0" bIns="0" rtlCol="0" anchor="ctr">
-            <a:normAutofit/>
-          </a:bodyPr>
-          <a:lstStyle/>
-          <a:p>
-            <a:pPr algn="l" indent="0" marL="0">
-              <a:buNone/>
-            </a:pPr>
-            <a:r>
-              <a:rPr lang="en-US" sz="1600" b="1" dirty="0">
+          <p:cNvPr id="9" name="TextBox 8"/>
+          <p:cNvSpPr txBox="1"/>
+          <p:nvPr/>
+        </p:nvSpPr>
+        <p:spPr>
+          <a:xfrm>
+            <a:off x="749808" y="2414016"/>
+            <a:ext cx="10789920" cy="731520"/>
+          </a:xfrm>
+          <a:prstGeom prst="rect">
+            <a:avLst/>
+          </a:prstGeom>
+          <a:noFill/>
+        </p:spPr>
+        <p:txBody>
+          <a:bodyPr wrap="square" lIns="0" rIns="0" tIns="0" bIns="0" anchor="ctr">
+            <a:noAutofit/>
+          </a:bodyPr>
+          <a:lstStyle/>
+          <a:p>
+            <a:r>
+              <a:rPr sz="3200" b="1">
+                <a:solidFill>
+                  <a:srgbClr val="F5F7FA"/>
+                </a:solidFill>
+                <a:latin typeface="Noto Sans CJK KR"/>
+              </a:rPr>
+              <a:t>조합을 읽고, 근거로 선택하다.</a:t>
+            </a:r>
+          </a:p>
+        </p:txBody>
+      </p:sp>
+      <p:sp>
+        <p:nvSpPr>
+          <p:cNvPr id="10" name="TextBox 9"/>
+          <p:cNvSpPr txBox="1"/>
+          <p:nvPr/>
+        </p:nvSpPr>
+        <p:spPr>
+          <a:xfrm>
+            <a:off x="768096" y="3703320"/>
+            <a:ext cx="10698480" cy="438912"/>
+          </a:xfrm>
+          <a:prstGeom prst="rect">
+            <a:avLst/>
+          </a:prstGeom>
+          <a:noFill/>
+        </p:spPr>
+        <p:txBody>
+          <a:bodyPr wrap="square" lIns="0" rIns="0" tIns="0" bIns="0" anchor="ctr">
+            <a:noAutofit/>
+          </a:bodyPr>
+          <a:lstStyle/>
+          <a:p>
+            <a:r>
+              <a:rPr sz="1900" b="1">
                 <a:solidFill>
                   <a:srgbClr val="D9BA78"/>
                 </a:solidFill>
-                <a:latin typeface="Noto Sans CJK KR" pitchFamily="34" charset="0"/>
-                <a:ea typeface="Noto Sans CJK KR" pitchFamily="34" charset="-122"/>
-                <a:cs typeface="Noto Sans CJK KR" pitchFamily="34" charset="-120"/>
-              </a:rPr>
-              <a:t>① 공개 GitHub 저장소</a:t>
-            </a:r>
-            <a:endParaRPr lang="en-US" sz="1600" dirty="0"/>
-          </a:p>
-        </p:txBody>
-      </p:sp>
-      <p:sp>
-        <p:nvSpPr>
-          <p:cNvPr id="11" name="Text 9"/>
-          <p:cNvSpPr/>
-          <p:nvPr/>
-        </p:nvSpPr>
-        <p:spPr>
-          <a:xfrm>
-            <a:off x="877824" y="2423160"/>
-            <a:ext cx="4882896" cy="310896"/>
-          </a:xfrm>
-          <a:prstGeom prst="rect">
-            <a:avLst/>
-          </a:prstGeom>
-          <a:noFill/>
-          <a:ln/>
-        </p:spPr>
-        <p:txBody>
-          <a:bodyPr wrap="square" lIns="0" tIns="0" rIns="0" bIns="0" rtlCol="0" anchor="ctr">
-            <a:normAutofit/>
-          </a:bodyPr>
-          <a:lstStyle/>
-          <a:p>
-            <a:pPr algn="l" indent="0" marL="0">
-              <a:buNone/>
-            </a:pPr>
-            <a:r>
-              <a:rPr lang="en-US" sz="1200" dirty="0">
+                <a:latin typeface="Noto Sans CJK KR"/>
+              </a:rPr>
+              <a:t>DraftWise AI  ·  김예찬</a:t>
+            </a:r>
+          </a:p>
+        </p:txBody>
+      </p:sp>
+      <p:sp>
+        <p:nvSpPr>
+          <p:cNvPr id="11" name="TextBox 10"/>
+          <p:cNvSpPr txBox="1"/>
+          <p:nvPr/>
+        </p:nvSpPr>
+        <p:spPr>
+          <a:xfrm>
+            <a:off x="768096" y="4425696"/>
+            <a:ext cx="10698480" cy="347472"/>
+          </a:xfrm>
+          <a:prstGeom prst="rect">
+            <a:avLst/>
+          </a:prstGeom>
+          <a:noFill/>
+        </p:spPr>
+        <p:txBody>
+          <a:bodyPr wrap="square" lIns="0" rIns="0" tIns="0" bIns="0" anchor="ctr">
+            <a:noAutofit/>
+          </a:bodyPr>
+          <a:lstStyle/>
+          <a:p>
+            <a:r>
+              <a:rPr sz="1400" b="0">
                 <a:solidFill>
                   <a:srgbClr val="AFC3D1"/>
                 </a:solidFill>
-                <a:latin typeface="Noto Sans CJK KR" pitchFamily="34" charset="0"/>
-                <a:ea typeface="Noto Sans CJK KR" pitchFamily="34" charset="-122"/>
-                <a:cs typeface="Noto Sans CJK KR" pitchFamily="34" charset="-120"/>
-              </a:rPr>
-              <a:t>소스코드 · 테스트 · 실행 기록</a:t>
-            </a:r>
-            <a:endParaRPr lang="en-US" sz="1200" dirty="0"/>
-          </a:p>
-        </p:txBody>
-      </p:sp>
-      <p:sp>
-        <p:nvSpPr>
-          <p:cNvPr id="12" name="Shape 10">
-            <a:hlinkClick r:id="rId1" tooltip=""/>
-          </p:cNvPr>
-          <p:cNvSpPr/>
-          <p:nvPr/>
-        </p:nvSpPr>
-        <p:spPr>
-          <a:xfrm>
-            <a:off x="658368" y="1801368"/>
-            <a:ext cx="5340096" cy="1252728"/>
-          </a:xfrm>
-          <a:prstGeom prst="rect">
-            <a:avLst/>
-          </a:prstGeom>
-          <a:solidFill>
-            <a:srgbClr val="FFFFFF">
-              <a:alpha val="0"/>
-            </a:srgbClr>
-          </a:solidFill>
-          <a:ln w="12700">
-            <a:solidFill>
-              <a:srgbClr val="333333">
-                <a:alpha val="0"/>
-              </a:srgbClr>
-            </a:solidFill>
-            <a:prstDash val="solid"/>
-          </a:ln>
-        </p:spPr>
-      </p:sp>
-      <p:sp>
-        <p:nvSpPr>
-          <p:cNvPr id="13" name="Shape 11"/>
-          <p:cNvSpPr/>
-          <p:nvPr/>
-        </p:nvSpPr>
-        <p:spPr>
-          <a:xfrm>
-            <a:off x="6217920" y="1801368"/>
-            <a:ext cx="5340096" cy="1252728"/>
-          </a:xfrm>
-          <a:prstGeom prst="roundRect">
-            <a:avLst>
-              <a:gd name="adj" fmla="val 13139"/>
-            </a:avLst>
-          </a:prstGeom>
-          <a:solidFill>
-            <a:srgbClr val="122637"/>
-          </a:solidFill>
-          <a:ln w="12700">
-            <a:solidFill>
-              <a:srgbClr val="122637">
-                <a:alpha val="0"/>
-              </a:srgbClr>
-            </a:solidFill>
-            <a:prstDash val="solid"/>
-          </a:ln>
-        </p:spPr>
-      </p:sp>
-      <p:sp>
-        <p:nvSpPr>
-          <p:cNvPr id="14" name="Text 12"/>
-          <p:cNvSpPr/>
-          <p:nvPr/>
-        </p:nvSpPr>
-        <p:spPr>
-          <a:xfrm>
-            <a:off x="6437376" y="1965960"/>
-            <a:ext cx="4882896" cy="365760"/>
-          </a:xfrm>
-          <a:prstGeom prst="rect">
-            <a:avLst/>
-          </a:prstGeom>
-          <a:noFill/>
-          <a:ln/>
-        </p:spPr>
-        <p:txBody>
-          <a:bodyPr wrap="square" lIns="0" tIns="0" rIns="0" bIns="0" rtlCol="0" anchor="ctr">
-            <a:normAutofit/>
-          </a:bodyPr>
-          <a:lstStyle/>
-          <a:p>
-            <a:pPr algn="l" indent="0" marL="0">
-              <a:buNone/>
-            </a:pPr>
-            <a:r>
-              <a:rPr lang="en-US" sz="1600" b="1" dirty="0">
-                <a:solidFill>
-                  <a:srgbClr val="D9BA78"/>
-                </a:solidFill>
-                <a:latin typeface="Noto Sans CJK KR" pitchFamily="34" charset="0"/>
-                <a:ea typeface="Noto Sans CJK KR" pitchFamily="34" charset="-122"/>
-                <a:cs typeface="Noto Sans CJK KR" pitchFamily="34" charset="-120"/>
-              </a:rPr>
-              <a:t>② 최종 결과 보고서</a:t>
-            </a:r>
-            <a:endParaRPr lang="en-US" sz="1600" dirty="0"/>
-          </a:p>
-        </p:txBody>
-      </p:sp>
-      <p:sp>
-        <p:nvSpPr>
-          <p:cNvPr id="15" name="Text 13"/>
-          <p:cNvSpPr/>
-          <p:nvPr/>
-        </p:nvSpPr>
-        <p:spPr>
-          <a:xfrm>
-            <a:off x="6437376" y="2423160"/>
-            <a:ext cx="4882896" cy="310896"/>
-          </a:xfrm>
-          <a:prstGeom prst="rect">
-            <a:avLst/>
-          </a:prstGeom>
-          <a:noFill/>
-          <a:ln/>
-        </p:spPr>
-        <p:txBody>
-          <a:bodyPr wrap="square" lIns="0" tIns="0" rIns="0" bIns="0" rtlCol="0" anchor="ctr">
-            <a:normAutofit/>
-          </a:bodyPr>
-          <a:lstStyle/>
-          <a:p>
-            <a:pPr algn="l" indent="0" marL="0">
-              <a:buNone/>
-            </a:pPr>
-            <a:r>
-              <a:rPr lang="en-US" sz="1200" dirty="0">
-                <a:solidFill>
-                  <a:srgbClr val="AFC3D1"/>
-                </a:solidFill>
-                <a:latin typeface="Noto Sans CJK KR" pitchFamily="34" charset="0"/>
-                <a:ea typeface="Noto Sans CJK KR" pitchFamily="34" charset="-122"/>
-                <a:cs typeface="Noto Sans CJK KR" pitchFamily="34" charset="-120"/>
-              </a:rPr>
-              <a:t>REPORT.md · 실제 캡처 포함</a:t>
-            </a:r>
-            <a:endParaRPr lang="en-US" sz="1200" dirty="0"/>
-          </a:p>
-        </p:txBody>
-      </p:sp>
-      <p:sp>
-        <p:nvSpPr>
-          <p:cNvPr id="16" name="Shape 14">
-            <a:hlinkClick r:id="rId2" tooltip=""/>
-          </p:cNvPr>
-          <p:cNvSpPr/>
-          <p:nvPr/>
-        </p:nvSpPr>
-        <p:spPr>
-          <a:xfrm>
-            <a:off x="6217920" y="1801368"/>
-            <a:ext cx="5340096" cy="1252728"/>
-          </a:xfrm>
-          <a:prstGeom prst="rect">
-            <a:avLst/>
-          </a:prstGeom>
-          <a:solidFill>
-            <a:srgbClr val="FFFFFF">
-              <a:alpha val="0"/>
-            </a:srgbClr>
-          </a:solidFill>
-          <a:ln w="12700">
-            <a:solidFill>
-              <a:srgbClr val="333333">
-                <a:alpha val="0"/>
-              </a:srgbClr>
-            </a:solidFill>
-            <a:prstDash val="solid"/>
-          </a:ln>
-        </p:spPr>
-      </p:sp>
-      <p:sp>
-        <p:nvSpPr>
-          <p:cNvPr id="17" name="Shape 15"/>
-          <p:cNvSpPr/>
-          <p:nvPr/>
-        </p:nvSpPr>
-        <p:spPr>
-          <a:xfrm>
-            <a:off x="658368" y="3328416"/>
-            <a:ext cx="5340096" cy="1252728"/>
-          </a:xfrm>
-          <a:prstGeom prst="roundRect">
-            <a:avLst>
-              <a:gd name="adj" fmla="val 13139"/>
-            </a:avLst>
-          </a:prstGeom>
-          <a:solidFill>
-            <a:srgbClr val="122637"/>
-          </a:solidFill>
-          <a:ln w="12700">
-            <a:solidFill>
-              <a:srgbClr val="122637">
-                <a:alpha val="0"/>
-              </a:srgbClr>
-            </a:solidFill>
-            <a:prstDash val="solid"/>
-          </a:ln>
-        </p:spPr>
-      </p:sp>
-      <p:sp>
-        <p:nvSpPr>
-          <p:cNvPr id="18" name="Text 16"/>
-          <p:cNvSpPr/>
-          <p:nvPr/>
-        </p:nvSpPr>
-        <p:spPr>
-          <a:xfrm>
-            <a:off x="877824" y="3493008"/>
-            <a:ext cx="4882896" cy="365760"/>
-          </a:xfrm>
-          <a:prstGeom prst="rect">
-            <a:avLst/>
-          </a:prstGeom>
-          <a:noFill/>
-          <a:ln/>
-        </p:spPr>
-        <p:txBody>
-          <a:bodyPr wrap="square" lIns="0" tIns="0" rIns="0" bIns="0" rtlCol="0" anchor="ctr">
-            <a:normAutofit/>
-          </a:bodyPr>
-          <a:lstStyle/>
-          <a:p>
-            <a:pPr algn="l" indent="0" marL="0">
-              <a:buNone/>
-            </a:pPr>
-            <a:r>
-              <a:rPr lang="en-US" sz="1600" b="1" dirty="0">
-                <a:solidFill>
-                  <a:srgbClr val="F5F7FA"/>
-                </a:solidFill>
-                <a:latin typeface="Noto Sans CJK KR" pitchFamily="34" charset="0"/>
-                <a:ea typeface="Noto Sans CJK KR" pitchFamily="34" charset="-122"/>
-                <a:cs typeface="Noto Sans CJK KR" pitchFamily="34" charset="-120"/>
-              </a:rPr>
-              <a:t>③ 5분 발표자료</a:t>
-            </a:r>
-            <a:endParaRPr lang="en-US" sz="1600" dirty="0"/>
-          </a:p>
-        </p:txBody>
-      </p:sp>
-      <p:sp>
-        <p:nvSpPr>
-          <p:cNvPr id="19" name="Text 17"/>
-          <p:cNvSpPr/>
-          <p:nvPr/>
-        </p:nvSpPr>
-        <p:spPr>
-          <a:xfrm>
-            <a:off x="877824" y="3950208"/>
-            <a:ext cx="4882896" cy="310896"/>
-          </a:xfrm>
-          <a:prstGeom prst="rect">
-            <a:avLst/>
-          </a:prstGeom>
-          <a:noFill/>
-          <a:ln/>
-        </p:spPr>
-        <p:txBody>
-          <a:bodyPr wrap="square" lIns="0" tIns="0" rIns="0" bIns="0" rtlCol="0" anchor="ctr">
-            <a:normAutofit/>
-          </a:bodyPr>
-          <a:lstStyle/>
-          <a:p>
-            <a:pPr algn="l" indent="0" marL="0">
-              <a:buNone/>
-            </a:pPr>
-            <a:r>
-              <a:rPr lang="en-US" sz="1200" dirty="0">
-                <a:solidFill>
-                  <a:srgbClr val="AFC3D1"/>
-                </a:solidFill>
-                <a:latin typeface="Noto Sans CJK KR" pitchFamily="34" charset="0"/>
-                <a:ea typeface="Noto Sans CJK KR" pitchFamily="34" charset="-122"/>
-                <a:cs typeface="Noto Sans CJK KR" pitchFamily="34" charset="-120"/>
-              </a:rPr>
-              <a:t>현재 PPT 파일 · 화면 공유용</a:t>
-            </a:r>
-            <a:endParaRPr lang="en-US" sz="1200" dirty="0"/>
-          </a:p>
-        </p:txBody>
-      </p:sp>
-      <p:sp>
-        <p:nvSpPr>
-          <p:cNvPr id="20" name="Shape 18"/>
-          <p:cNvSpPr/>
-          <p:nvPr/>
-        </p:nvSpPr>
-        <p:spPr>
-          <a:xfrm>
-            <a:off x="6217920" y="3328416"/>
-            <a:ext cx="5340096" cy="1252728"/>
-          </a:xfrm>
-          <a:prstGeom prst="roundRect">
-            <a:avLst>
-              <a:gd name="adj" fmla="val 13139"/>
-            </a:avLst>
-          </a:prstGeom>
-          <a:solidFill>
-            <a:srgbClr val="122637"/>
-          </a:solidFill>
-          <a:ln w="12700">
-            <a:solidFill>
-              <a:srgbClr val="122637">
-                <a:alpha val="0"/>
-              </a:srgbClr>
-            </a:solidFill>
-            <a:prstDash val="solid"/>
-          </a:ln>
-        </p:spPr>
-      </p:sp>
-      <p:sp>
-        <p:nvSpPr>
-          <p:cNvPr id="21" name="Text 19"/>
-          <p:cNvSpPr/>
-          <p:nvPr/>
-        </p:nvSpPr>
-        <p:spPr>
-          <a:xfrm>
-            <a:off x="6437376" y="3493008"/>
-            <a:ext cx="4882896" cy="365760"/>
-          </a:xfrm>
-          <a:prstGeom prst="rect">
-            <a:avLst/>
-          </a:prstGeom>
-          <a:noFill/>
-          <a:ln/>
-        </p:spPr>
-        <p:txBody>
-          <a:bodyPr wrap="square" lIns="0" tIns="0" rIns="0" bIns="0" rtlCol="0" anchor="ctr">
-            <a:normAutofit/>
-          </a:bodyPr>
-          <a:lstStyle/>
-          <a:p>
-            <a:pPr algn="l" indent="0" marL="0">
-              <a:buNone/>
-            </a:pPr>
-            <a:r>
-              <a:rPr lang="en-US" sz="1600" b="1" dirty="0">
-                <a:solidFill>
-                  <a:srgbClr val="F5F7FA"/>
-                </a:solidFill>
-                <a:latin typeface="Noto Sans CJK KR" pitchFamily="34" charset="0"/>
-                <a:ea typeface="Noto Sans CJK KR" pitchFamily="34" charset="-122"/>
-                <a:cs typeface="Noto Sans CJK KR" pitchFamily="34" charset="-120"/>
-              </a:rPr>
-              <a:t>④ 실행 증빙</a:t>
-            </a:r>
-            <a:endParaRPr lang="en-US" sz="1600" dirty="0"/>
-          </a:p>
-        </p:txBody>
-      </p:sp>
-      <p:sp>
-        <p:nvSpPr>
-          <p:cNvPr id="22" name="Text 20"/>
-          <p:cNvSpPr/>
-          <p:nvPr/>
-        </p:nvSpPr>
-        <p:spPr>
-          <a:xfrm>
-            <a:off x="6437376" y="3950208"/>
-            <a:ext cx="4882896" cy="310896"/>
-          </a:xfrm>
-          <a:prstGeom prst="rect">
-            <a:avLst/>
-          </a:prstGeom>
-          <a:noFill/>
-          <a:ln/>
-        </p:spPr>
-        <p:txBody>
-          <a:bodyPr wrap="square" lIns="0" tIns="0" rIns="0" bIns="0" rtlCol="0" anchor="ctr">
-            <a:normAutofit/>
-          </a:bodyPr>
-          <a:lstStyle/>
-          <a:p>
-            <a:pPr algn="l" indent="0" marL="0">
-              <a:buNone/>
-            </a:pPr>
-            <a:r>
-              <a:rPr lang="en-US" sz="1200" dirty="0">
-                <a:solidFill>
-                  <a:srgbClr val="AFC3D1"/>
-                </a:solidFill>
-                <a:latin typeface="Noto Sans CJK KR" pitchFamily="34" charset="0"/>
-                <a:ea typeface="Noto Sans CJK KR" pitchFamily="34" charset="-122"/>
-                <a:cs typeface="Noto Sans CJK KR" pitchFamily="34" charset="-120"/>
-              </a:rPr>
-              <a:t>실제 OpenAI/MCP/LangGraph 기록</a:t>
-            </a:r>
-            <a:endParaRPr lang="en-US" sz="1200" dirty="0"/>
-          </a:p>
-        </p:txBody>
-      </p:sp>
-      <p:sp>
-        <p:nvSpPr>
-          <p:cNvPr id="23" name="Shape 21">
-            <a:hlinkClick r:id="rId3" tooltip=""/>
-          </p:cNvPr>
-          <p:cNvSpPr/>
-          <p:nvPr/>
-        </p:nvSpPr>
-        <p:spPr>
-          <a:xfrm>
-            <a:off x="6217920" y="3328416"/>
-            <a:ext cx="5340096" cy="1252728"/>
-          </a:xfrm>
-          <a:prstGeom prst="rect">
-            <a:avLst/>
-          </a:prstGeom>
-          <a:solidFill>
-            <a:srgbClr val="FFFFFF">
-              <a:alpha val="0"/>
-            </a:srgbClr>
-          </a:solidFill>
-          <a:ln w="12700">
-            <a:solidFill>
-              <a:srgbClr val="333333">
-                <a:alpha val="0"/>
-              </a:srgbClr>
-            </a:solidFill>
-            <a:prstDash val="solid"/>
-          </a:ln>
-        </p:spPr>
-      </p:sp>
-      <p:sp>
-        <p:nvSpPr>
-          <p:cNvPr id="24" name="Shape 22"/>
-          <p:cNvSpPr/>
-          <p:nvPr/>
-        </p:nvSpPr>
-        <p:spPr>
-          <a:xfrm>
-            <a:off x="658368" y="5184648"/>
-            <a:ext cx="10908792" cy="749808"/>
-          </a:xfrm>
-          <a:prstGeom prst="roundRect">
-            <a:avLst>
-              <a:gd name="adj" fmla="val 21951"/>
-            </a:avLst>
-          </a:prstGeom>
-          <a:solidFill>
-            <a:srgbClr val="193246"/>
-          </a:solidFill>
-          <a:ln w="12700">
-            <a:solidFill>
-              <a:srgbClr val="193246">
-                <a:alpha val="0"/>
-              </a:srgbClr>
-            </a:solidFill>
-            <a:prstDash val="solid"/>
-          </a:ln>
-        </p:spPr>
-      </p:sp>
-      <p:sp>
-        <p:nvSpPr>
-          <p:cNvPr id="25" name="Text 23"/>
-          <p:cNvSpPr/>
-          <p:nvPr/>
-        </p:nvSpPr>
-        <p:spPr>
-          <a:xfrm>
-            <a:off x="914400" y="5349240"/>
-            <a:ext cx="1508760" cy="365760"/>
-          </a:xfrm>
-          <a:prstGeom prst="rect">
-            <a:avLst/>
-          </a:prstGeom>
-          <a:noFill/>
-          <a:ln/>
-        </p:spPr>
-        <p:txBody>
-          <a:bodyPr wrap="square" lIns="0" tIns="0" rIns="0" bIns="0" rtlCol="0" anchor="ctr">
-            <a:normAutofit/>
-          </a:bodyPr>
-          <a:lstStyle/>
-          <a:p>
-            <a:pPr algn="l" indent="0" marL="0">
-              <a:buNone/>
-            </a:pPr>
-            <a:r>
-              <a:rPr lang="en-US" sz="1500" b="1" dirty="0">
-                <a:solidFill>
-                  <a:srgbClr val="D9BA78"/>
-                </a:solidFill>
-                <a:latin typeface="Noto Sans CJK KR" pitchFamily="34" charset="0"/>
-                <a:ea typeface="Noto Sans CJK KR" pitchFamily="34" charset="-122"/>
-                <a:cs typeface="Noto Sans CJK KR" pitchFamily="34" charset="-120"/>
-              </a:rPr>
-              <a:t>남은 확인</a:t>
-            </a:r>
-            <a:endParaRPr lang="en-US" sz="1500" dirty="0"/>
-          </a:p>
-        </p:txBody>
-      </p:sp>
-      <p:sp>
-        <p:nvSpPr>
-          <p:cNvPr id="26" name="Text 24"/>
-          <p:cNvSpPr/>
-          <p:nvPr/>
-        </p:nvSpPr>
-        <p:spPr>
-          <a:xfrm>
-            <a:off x="2441448" y="5312664"/>
-            <a:ext cx="8732520" cy="420624"/>
-          </a:xfrm>
-          <a:prstGeom prst="rect">
-            <a:avLst/>
-          </a:prstGeom>
-          <a:noFill/>
-          <a:ln/>
-        </p:spPr>
-        <p:txBody>
-          <a:bodyPr wrap="square" lIns="0" tIns="0" rIns="0" bIns="0" rtlCol="0" anchor="ctr">
-            <a:normAutofit/>
-          </a:bodyPr>
-          <a:lstStyle/>
-          <a:p>
-            <a:pPr algn="l" indent="0" marL="0">
-              <a:buNone/>
-            </a:pPr>
-            <a:r>
-              <a:rPr lang="en-US" sz="1300" dirty="0">
-                <a:solidFill>
-                  <a:srgbClr val="F5F7FA"/>
-                </a:solidFill>
-                <a:latin typeface="Noto Sans CJK KR" pitchFamily="34" charset="0"/>
-                <a:ea typeface="Noto Sans CJK KR" pitchFamily="34" charset="-122"/>
-                <a:cs typeface="Noto Sans CJK KR" pitchFamily="34" charset="-120"/>
-              </a:rPr>
-              <a:t>교육생 번호 입력 · 기존 ZIP 기반 조건 확인 · 발표 리허설 · 제출 포털 링크 등록</a:t>
-            </a:r>
-            <a:endParaRPr lang="en-US" sz="1300" dirty="0"/>
-          </a:p>
-        </p:txBody>
-      </p:sp>
-      <p:sp>
-        <p:nvSpPr>
-          <p:cNvPr id="27" name="Text 25"/>
-          <p:cNvSpPr/>
-          <p:nvPr/>
-        </p:nvSpPr>
-        <p:spPr>
-          <a:xfrm>
-            <a:off x="777240" y="6163056"/>
-            <a:ext cx="10716768" cy="310896"/>
-          </a:xfrm>
-          <a:prstGeom prst="rect">
-            <a:avLst/>
-          </a:prstGeom>
-          <a:noFill/>
-          <a:ln/>
-        </p:spPr>
-        <p:txBody>
-          <a:bodyPr wrap="square" lIns="0" tIns="0" rIns="0" bIns="0" rtlCol="0" anchor="ctr">
-            <a:normAutofit/>
-          </a:bodyPr>
-          <a:lstStyle/>
-          <a:p>
-            <a:pPr algn="l" indent="0" marL="0">
-              <a:buNone/>
-            </a:pPr>
-            <a:r>
-              <a:rPr lang="en-US" sz="1100" dirty="0">
-                <a:solidFill>
-                  <a:srgbClr val="AFC3D1"/>
-                </a:solidFill>
-                <a:latin typeface="Noto Sans CJK KR" pitchFamily="34" charset="0"/>
-                <a:ea typeface="Noto Sans CJK KR" pitchFamily="34" charset="-122"/>
-                <a:cs typeface="Noto Sans CJK KR" pitchFamily="34" charset="-120"/>
-              </a:rPr>
-              <a:t>제출 13:00까지 / Zoom 점검 13:20–14:00 / 발표 14:00부터 (1인 5분)</a:t>
-            </a:r>
-            <a:endParaRPr lang="en-US" sz="1100" dirty="0"/>
+                <a:latin typeface="Noto Sans CJK KR"/>
+              </a:rPr>
+              <a:t>github.com/ii2001/DraftWise-AI</a:t>
+            </a:r>
           </a:p>
         </p:txBody>
       </p:sp>

--- a/presentation/DraftWise_AI_5min_FINAL.pptx
+++ b/presentation/DraftWise_AI_5min_FINAL.pptx
@@ -508,7 +508,7 @@
           <a:lstStyle/>
           <a:p>
             <a:r>
-              <a:t>목표 20초 · 전체 목표 4분 45초 (실제 낭독 실측 아님)</a:t>
+              <a:t>목표 15초 · 전체 목표 4분 45초 (실제 낭독 실측 아님)</a:t>
             </a:r>
           </a:p>
           <a:p/>
@@ -974,7 +974,7 @@
           <a:p/>
           <a:p>
             <a:r>
-              <a:t>Python 43개, Node 8개 검사와 Chrome 12개 시나리오를 확인했습니다. 실제 OpenAI, LangGraph, MCP 실행 모드와 로그도 남겼습니다. API 네 요청의 HTTP 평균은 약 1.44초였습니다. 아래는 실제 저장 이력 화면으로, 추가 모델 호출 없이 저장한 결과와 입력 설정을 복원합니다.</a:t>
+              <a:t>Python 46개, Node 8개 검사와 Chrome 12개 시나리오를 확인했습니다. 실제 OpenAI, LangGraph, MCP 실행 모드와 로그도 남겼습니다. API 네 요청의 HTTP 평균은 약 1.44초였습니다. 아래는 실제 저장 이력 화면으로, 추가 모델 호출 없이 저장한 결과와 입력 설정을 복원합니다.</a:t>
             </a:r>
           </a:p>
         </p:txBody>
@@ -1060,13 +1060,13 @@
           <a:lstStyle/>
           <a:p>
             <a:r>
-              <a:t>목표 45초 · 전체 목표 4분 45초 (실제 낭독 실측 아님)</a:t>
+              <a:t>목표 55초 · 전체 목표 4분 45초 (실제 낭독 실측 아님)</a:t>
             </a:r>
           </a:p>
           <a:p/>
           <a:p>
             <a:r>
-              <a:t>동일한 네 입력에서 단순 가나다순 Baseline은 세 건, 개선 방식은 네 건의 조합 보완 조건을 통과했습니다. 네 사례의 결과를 일반 정확도나 실제 승률로 해석할 수는 없습니다. 실제 출력에서 밴하지 않은 자크를 밴됐다고 설명하는 오류를 발견했고, 근거 선택과 서버 검증으로 출력 경계를 바꿨습니다. 수정 후 실제 출력 다섯 건과 과거 오류 재주입을 확인했습니다. 대신 자유로운 전략 답변은 줄었습니다.</a:t>
+              <a:t>다섯 포지션을 두 번씩 포함한 랜덤 밴픽 열 개를 고정 seed로 만들었습니다. 양쪽 모두 같은 주력 세 명 중에서 고릅니다. AD, AP, 앞라인, 강한 CC에 각각 25점을 주는 조합 완성도는 평균 90점에서 95점으로, 완성 조합은 여섯 건에서 여덟 건으로 늘었습니다. 나머지 두 건은 후보에 앞라인이 없었습니다. 이 구조 점수는 실제 승률이 아닙니다. 실제 설명에서 잘못된 밴 서술을 발견해 근거 선택과 서버 검증으로 수정했고, 수정 후 실제 응답 다섯 건과 오류 재주입을 확인했습니다. 대신 자유로운 답변은 줄었습니다.</a:t>
             </a:r>
           </a:p>
         </p:txBody>
@@ -1152,7 +1152,7 @@
           <a:lstStyle/>
           <a:p>
             <a:r>
-              <a:t>목표 15초 · 전체 목표 4분 45초 (실제 낭독 실측 아님)</a:t>
+              <a:t>목표 10초 · 전체 목표 4분 45초 (실제 낭독 실측 아님)</a:t>
             </a:r>
           </a:p>
           <a:p/>
@@ -6388,7 +6388,7 @@
                 <a:ea typeface="Noto Sans CJK KR" pitchFamily="34" charset="-122"/>
                 <a:cs typeface="Noto Sans CJK KR" pitchFamily="34" charset="-120"/>
               </a:rPr>
-              <a:t>43 / 43</a:t>
+              <a:t>46 / 46</a:t>
             </a:r>
             <a:endParaRPr lang="en-US" sz="3600" dirty="0"/>
           </a:p>
@@ -7206,7 +7206,7 @@
                 <a:ea typeface="Noto Sans CJK KR" pitchFamily="34" charset="-122"/>
                 <a:cs typeface="Noto Sans CJK KR" pitchFamily="34" charset="-120"/>
               </a:rPr>
-              <a:t>Before / After  ·  동일한 4개 입력</a:t>
+              <a:t>랜덤 10개 · 평균 조합 완성도 (100점)</a:t>
             </a:r>
             <a:endParaRPr lang="en-US" sz="1400" dirty="0"/>
           </a:p>
@@ -7247,7 +7247,7 @@
                 <a:ea typeface="Noto Sans CJK KR" pitchFamily="34" charset="-122"/>
                 <a:cs typeface="Noto Sans CJK KR" pitchFamily="34" charset="-120"/>
               </a:rPr>
-              <a:t>Baseline</a:t>
+              <a:t>랜덤 추천</a:t>
             </a:r>
             <a:endParaRPr lang="en-US" sz="1500" dirty="0"/>
           </a:p>
@@ -7291,7 +7291,7 @@
         <p:spPr>
           <a:xfrm>
             <a:off x="2523744" y="2624328"/>
-            <a:ext cx="1796796" cy="155448"/>
+            <a:ext cx="2156155" cy="155448"/>
           </a:xfrm>
           <a:prstGeom prst="roundRect">
             <a:avLst>
@@ -7346,7 +7346,7 @@
                 <a:ea typeface="Noto Sans CJK KR" pitchFamily="34" charset="-122"/>
                 <a:cs typeface="Noto Sans CJK KR" pitchFamily="34" charset="-120"/>
               </a:rPr>
-              <a:t>3 / 4</a:t>
+              <a:t>90점</a:t>
             </a:r>
             <a:endParaRPr lang="en-US" sz="1900" dirty="0"/>
           </a:p>
@@ -7431,7 +7431,7 @@
         <p:spPr>
           <a:xfrm>
             <a:off x="2523744" y="3255264"/>
-            <a:ext cx="2395728" cy="155448"/>
+            <a:ext cx="2275942" cy="155448"/>
           </a:xfrm>
           <a:prstGeom prst="roundRect">
             <a:avLst>
@@ -7486,7 +7486,7 @@
                 <a:ea typeface="Noto Sans CJK KR" pitchFamily="34" charset="-122"/>
                 <a:cs typeface="Noto Sans CJK KR" pitchFamily="34" charset="-120"/>
               </a:rPr>
-              <a:t>4 / 4</a:t>
+              <a:t>95점</a:t>
             </a:r>
             <a:endParaRPr lang="en-US" sz="1900" dirty="0"/>
           </a:p>
@@ -7527,7 +7527,7 @@
                 <a:ea typeface="Noto Sans CJK KR" pitchFamily="34" charset="-122"/>
                 <a:cs typeface="Noto Sans CJK KR" pitchFamily="34" charset="-120"/>
               </a:rPr>
-              <a:t>사전에 정한 조합 보완 조건의 통과 건수</a:t>
+              <a:t>완성 조합 6/10 → 8/10 · 네 특성 각 25점</a:t>
             </a:r>
             <a:endParaRPr lang="en-US" sz="1000" dirty="0"/>
           </a:p>
@@ -7995,7 +7995,7 @@
                 <a:ea typeface="Noto Sans CJK KR" pitchFamily="34" charset="-122"/>
                 <a:cs typeface="Noto Sans CJK KR" pitchFamily="34" charset="-120"/>
               </a:rPr>
-              <a:t>실시간 승률·전적·메타 통계는 없음  |  Baseline은 단순 기준선  |  실제 게임 승률 검증 아님</a:t>
+              <a:t>고정 seed 20261022 · 공통 주력 3명 제한 · 합성 입력 10개 · 실제 게임 승률 검증 아님</a:t>
             </a:r>
             <a:endParaRPr lang="en-US" sz="1100" dirty="0"/>
           </a:p>
